--- a/decks/triple-space/triple-space_ch3_orbits.pptx
+++ b/decks/triple-space/triple-space_ch3_orbits.pptx
@@ -124,29 +124,29 @@
   <p:extLst>
     <p:ext uri="{521415D9-36F7-43E2-AB2F-B90AF26B5E84}">
       <p14:sectionLst xmlns:p14="http://schemas.microsoft.com/office/powerpoint/2010/main">
-        <p14:section name="Opening" id="{4661c65e-8cb2-eb83-41fb-b31bba2db3b8}">
+        <p14:section name="Opening" id="{6e0453c7-7fb9-f9ef-d331-a5bb79045809}">
           <p14:sldIdLst>
             <p14:sldId id="256"/>
           </p14:sldIdLst>
         </p14:section>
-        <p14:section name="Gate" id="{29e9dc6d-1bf5-adc3-7da6-b24a99d0e25c}">
+        <p14:section name="Gate" id="{3d529f84-e2e7-3d3b-c8c3-2563f5acf4e6}">
           <p14:sldIdLst>
             <p14:sldId id="257"/>
             <p14:sldId id="258"/>
           </p14:sldIdLst>
         </p14:section>
-        <p14:section name="Pre-teach" id="{e4cbda0f-a709-4a98-e414-e7f3566ced01}">
+        <p14:section name="Pre-teach" id="{2581f2c8-1d5d-7ee3-6d03-e81ea5f47eb7}">
           <p14:sldIdLst>
             <p14:sldId id="259"/>
           </p14:sldIdLst>
         </p14:section>
-        <p14:section name="Read-along" id="{30b014a0-e306-5b17-027b-56de09e2b51b}">
+        <p14:section name="Read-along" id="{85b51eb6-2c4e-b6c0-8e91-1ad1765902ba}">
           <p14:sldIdLst>
             <p14:sldId id="260"/>
             <p14:sldId id="261"/>
           </p14:sldIdLst>
         </p14:section>
-        <p14:section name="Teach" id="{97f3b3c6-f55d-51e8-7a5f-fbee95b9fe68}">
+        <p14:section name="Teach" id="{861027b0-4720-5a57-f8dc-a9ecbfdfda13}">
           <p14:sldIdLst>
             <p14:sldId id="262"/>
             <p14:sldId id="263"/>
@@ -154,7 +154,7 @@
             <p14:sldId id="265"/>
           </p14:sldIdLst>
         </p14:section>
-        <p14:section name="Routes" id="{eead0fce-4f6d-bd90-e538-cd9da4f36e34}">
+        <p14:section name="Routes" id="{7e11c89a-3f3b-ec14-e304-7b9262f9cdb0}">
           <p14:sldIdLst>
             <p14:sldId id="266"/>
             <p14:sldId id="267"/>
@@ -162,12 +162,12 @@
             <p14:sldId id="269"/>
           </p14:sldIdLst>
         </p14:section>
-        <p14:section name="Close" id="{bdc24249-6cb9-8c63-9262-126d6e0f274d}">
+        <p14:section name="Close" id="{3017649b-d1a9-da35-5333-54b35c85a4bc}">
           <p14:sldIdLst>
             <p14:sldId id="270"/>
           </p14:sldIdLst>
         </p14:section>
-        <p14:section name="Answers" id="{c6007506-b5d2-60d1-0628-8ef916bdb91f}">
+        <p14:section name="Answers" id="{71961640-ff2e-1d65-1351-59207696b4dc}">
           <p14:sldIdLst>
             <p14:sldId id="271"/>
             <p14:sldId id="272"/>
@@ -1138,9 +1138,10 @@
             <a:r>
               <a:rPr lang="en-US" dirty="0"/>
               <a:t>Exit ticket — individual, silent, on a slip or mini-whiteboard. Recall before help: no notes, no lanes, no hints. Collect before pupils leave.
-Question: Match each orbiting object to the correct description.
-Answer: Planet  →  B  A large body that orbits the Sun; Moon  →  A  A natural satellite that orbits a planet; Artificial satellite  →  D  Built by people and launched into orbit; Geostationary satellite  →  C  Orbits once every 24 hours above the equator, so it stays over one point. All of them are kept in orbit by gravity. Planets orbit the Sun; moons are natural satellites of planets; artificial satellites are made by people; a geostationary satellite has a 24-hour period, matching the Earth's spin.
-Source of this question: module 3 task ("Planets, moons and artificial satellites") from the manifest.
+Question: Which force keeps the Moon in orbit around the Earth?
+Answer: C   Gravity. Gravity provides the force that keeps planets and satellites in their orbits. There is no air in space to give air resistance.
+Source of this question: gate item 1 re-asked (options rotated) — this chapter has no third quick-check module.
+The ebook also holds task 3, "Planets, moons and artificial satellites", for homework or the next lesson's do now.
 Sort the slips: correct → ready to move on; incorrect → start next lesson in the pre-teach group, with the read-along and the Support lane. Same destination next time.</a:t>
             </a:r>
             <a:endParaRPr lang="en-US" dirty="0"/>
@@ -1321,7 +1322,7 @@
             <a:r>
               <a:rPr lang="en-US" dirty="0"/>
               <a:t>Answers — task 2: Closer orbit, faster satellite (Higher). Reveal the answer; pupils mark their own work in a different colour, then read the "why" together. Same destination for every lane, so one answer serves the whole class.
-Answer: A   It must increase
+Answer: C   It must increase
 Why: For a stable orbit, if the radius changes the speed must change. Closer to the Earth gravity is stronger, so the satellite must move faster to stay in orbit.
 Ask a Support pupil to explain one step, and a Stretch pupil to share their extension.</a:t>
             </a:r>
@@ -1412,8 +1413,8 @@
             <a:r>
               <a:rPr lang="en-US" dirty="0"/>
               <a:t>Answers — exit ticket: Exit ticket. Reveal the answer; pupils mark their own work in a different colour, then read the "why" together. Same destination for every lane, so one answer serves the whole class.
-Answer: Planet  →  B  A large body that orbits the Sun; Moon  →  A  A natural satellite that orbits a planet; Artificial satellite  →  D  Built by people and launched into orbit; Geostationary satellite  →  C  Orbits once every 24 hours above the equator, so it stays over one point
-Why: All of them are kept in orbit by gravity. Planets orbit the Sun; moons are natural satellites of planets; artificial satellites are made by people; a geostationary satellite has a 24-hour period, matching the Earth's spin.
+Answer: C   Gravity
+Why: Gravity provides the force that keeps planets and satellites in their orbits. There is no air in space to give air resistance.
 Ask a Support pupil to explain one step, and a Stretch pupil to share their extension.</a:t>
             </a:r>
             <a:endParaRPr lang="en-US" dirty="0"/>
@@ -1503,7 +1504,7 @@
             <a:r>
               <a:rPr lang="en-US" dirty="0"/>
               <a:t>Do now — retrieval. Silent, no notes, no help: recall comes before any support. Give about four minutes.
-1. Which force keeps the Moon in orbit around the Earth?  →  A   Gravity
+1. Which force keeps the Moon in orbit around the Earth?  →  D   Gravity
 2. The time a satellite takes to make one complete orbit is called its ___.  →  period
 3. In which direction does gravity pull a satellite in a circular orbit?  →  A   Towards the centre of the orbit
 Circulate: who gets 3/3 (Stretch route), 2/3 (Core), 0–1 (Support)? Use this to route pupils later in the lesson.</a:t>
@@ -1595,7 +1596,7 @@
             <a:r>
               <a:rPr lang="en-US" dirty="0"/>
               <a:t>Answers — pupils mark their own in a different colour, then hands up for 3/3, 2/3, 1/3.
-1. A   Gravity. Gravity provides the force that keeps planets and satellites in their orbits. There is no air in space to give air resistance.
+1. D   Gravity. Gravity provides the force that keeps planets and satellites in their orbits. There is no air in space to give air resistance.
 2. period. The period is the time for one orbit. The Earth's period around the Sun is about 365 days.
 3. A   Towards the centre of the orbit. Gravity pulls the satellite towards the centre of the planet, which is the centre of the circular orbit.
 Say the route each score points to: 3/3 Stretch, 2/3 Core, 0–1 Support. Pupils may choose to move up.</a:t>
@@ -5000,7 +5001,7 @@
                 <a:ea typeface="Calibri" pitchFamily="34" charset="-122"/>
                 <a:cs typeface="Calibri" pitchFamily="34" charset="-120"/>
               </a:rPr>
-              <a:t>There is no resultant force on it</a:t>
+              <a:t>It is not accelerating</a:t>
             </a:r>
             <a:endParaRPr lang="en-US" sz="2600" dirty="0"/>
           </a:p>
@@ -5037,7 +5038,7 @@
                 <a:ea typeface="Calibri" pitchFamily="34" charset="-122"/>
                 <a:cs typeface="Calibri" pitchFamily="34" charset="-120"/>
               </a:rPr>
-              <a:t>It is not accelerating</a:t>
+              <a:t>There is no resultant force on it</a:t>
             </a:r>
             <a:endParaRPr lang="en-US" sz="2600" dirty="0"/>
           </a:p>
@@ -6440,7 +6441,7 @@
                 <a:ea typeface="Calibri" pitchFamily="34" charset="-122"/>
                 <a:cs typeface="Calibri" pitchFamily="34" charset="-120"/>
               </a:rPr>
-              <a:t>It must increase</a:t>
+              <a:t>It must decrease</a:t>
             </a:r>
             <a:endParaRPr lang="en-US" sz="2600" dirty="0"/>
           </a:p>
@@ -6477,7 +6478,7 @@
                 <a:ea typeface="Calibri" pitchFamily="34" charset="-122"/>
                 <a:cs typeface="Calibri" pitchFamily="34" charset="-120"/>
               </a:rPr>
-              <a:t>It must decrease</a:t>
+              <a:t>It must stay the same</a:t>
             </a:r>
             <a:endParaRPr lang="en-US" sz="2600" dirty="0"/>
           </a:p>
@@ -6514,7 +6515,7 @@
                 <a:ea typeface="Calibri" pitchFamily="34" charset="-122"/>
                 <a:cs typeface="Calibri" pitchFamily="34" charset="-120"/>
               </a:rPr>
-              <a:t>It must stay the same</a:t>
+              <a:t>It must increase</a:t>
             </a:r>
             <a:endParaRPr lang="en-US" sz="2600" dirty="0"/>
           </a:p>
@@ -7891,7 +7892,7 @@
         <p:spPr>
           <a:xfrm>
             <a:off x="2286000" y="1664208"/>
-            <a:ext cx="7802575" cy="2925064"/>
+            <a:ext cx="7802575" cy="2243328"/>
           </a:xfrm>
           <a:prstGeom prst="rect">
             <a:avLst/>
@@ -7918,7 +7919,7 @@
                 <a:ea typeface="Calibri" pitchFamily="34" charset="-122"/>
                 <a:cs typeface="Calibri" pitchFamily="34" charset="-120"/>
               </a:rPr>
-              <a:t>Match each orbiting object to the correct description.</a:t>
+              <a:t>Which force keeps the Moon in orbit around the Earth?</a:t>
             </a:r>
             <a:endParaRPr lang="en-US" sz="2400" dirty="0"/>
           </a:p>
@@ -7938,7 +7939,7 @@
                 <a:ea typeface="Calibri" pitchFamily="34" charset="-122"/>
                 <a:cs typeface="Calibri" pitchFamily="34" charset="-120"/>
               </a:rPr>
-              <a:t>1  </a:t>
+              <a:t>A   </a:t>
             </a:r>
             <a:pPr algn="l" indent="0" marL="0">
               <a:spcAft>
@@ -7955,8 +7956,11 @@
                 <a:ea typeface="Calibri" pitchFamily="34" charset="-122"/>
                 <a:cs typeface="Calibri" pitchFamily="34" charset="-120"/>
               </a:rPr>
-              <a:t>Planet</a:t>
-            </a:r>
+              <a:t>Air resistance</a:t>
+            </a:r>
+            <a:endParaRPr lang="en-US" sz="2400" dirty="0"/>
+          </a:p>
+          <a:p>
             <a:pPr algn="l" indent="0" marL="0">
               <a:spcAft>
                 <a:spcPts val="600"/>
@@ -7964,7 +7968,7 @@
               <a:buNone/>
             </a:pPr>
             <a:r>
-              <a:rPr lang="en-US" sz="2200" dirty="0">
+              <a:rPr lang="en-US" sz="2200" b="1" dirty="0">
                 <a:solidFill>
                   <a:srgbClr val="B8862B"/>
                 </a:solidFill>
@@ -7972,7 +7976,7 @@
                 <a:ea typeface="Calibri" pitchFamily="34" charset="-122"/>
                 <a:cs typeface="Calibri" pitchFamily="34" charset="-120"/>
               </a:rPr>
-              <a:t>      ⟷      </a:t>
+              <a:t>B   </a:t>
             </a:r>
             <a:pPr algn="l" indent="0" marL="0">
               <a:spcAft>
@@ -7981,16 +7985,19 @@
               <a:buNone/>
             </a:pPr>
             <a:r>
-              <a:rPr lang="en-US" sz="2200" b="1" dirty="0">
-                <a:solidFill>
-                  <a:srgbClr val="B8862B"/>
-                </a:solidFill>
-                <a:latin typeface="Calibri" pitchFamily="34" charset="0"/>
-                <a:ea typeface="Calibri" pitchFamily="34" charset="-122"/>
-                <a:cs typeface="Calibri" pitchFamily="34" charset="-120"/>
-              </a:rPr>
-              <a:t>A  </a:t>
-            </a:r>
+              <a:rPr lang="en-US" sz="2200" dirty="0">
+                <a:solidFill>
+                  <a:srgbClr val="1E2229"/>
+                </a:solidFill>
+                <a:latin typeface="Calibri" pitchFamily="34" charset="0"/>
+                <a:ea typeface="Calibri" pitchFamily="34" charset="-122"/>
+                <a:cs typeface="Calibri" pitchFamily="34" charset="-120"/>
+              </a:rPr>
+              <a:t>Friction</a:t>
+            </a:r>
+            <a:endParaRPr lang="en-US" sz="2400" dirty="0"/>
+          </a:p>
+          <a:p>
             <a:pPr algn="l" indent="0" marL="0">
               <a:spcAft>
                 <a:spcPts val="600"/>
@@ -7998,19 +8005,16 @@
               <a:buNone/>
             </a:pPr>
             <a:r>
-              <a:rPr lang="en-US" sz="2200" dirty="0">
-                <a:solidFill>
-                  <a:srgbClr val="1E2229"/>
-                </a:solidFill>
-                <a:latin typeface="Calibri" pitchFamily="34" charset="0"/>
-                <a:ea typeface="Calibri" pitchFamily="34" charset="-122"/>
-                <a:cs typeface="Calibri" pitchFamily="34" charset="-120"/>
-              </a:rPr>
-              <a:t>A natural satellite that orbits a planet</a:t>
-            </a:r>
-            <a:endParaRPr lang="en-US" sz="2400" dirty="0"/>
-          </a:p>
-          <a:p>
+              <a:rPr lang="en-US" sz="2200" b="1" dirty="0">
+                <a:solidFill>
+                  <a:srgbClr val="B8862B"/>
+                </a:solidFill>
+                <a:latin typeface="Calibri" pitchFamily="34" charset="0"/>
+                <a:ea typeface="Calibri" pitchFamily="34" charset="-122"/>
+                <a:cs typeface="Calibri" pitchFamily="34" charset="-120"/>
+              </a:rPr>
+              <a:t>C   </a:t>
+            </a:r>
             <a:pPr algn="l" indent="0" marL="0">
               <a:spcAft>
                 <a:spcPts val="600"/>
@@ -8018,16 +8022,19 @@
               <a:buNone/>
             </a:pPr>
             <a:r>
-              <a:rPr lang="en-US" sz="2200" b="1" dirty="0">
-                <a:solidFill>
-                  <a:srgbClr val="B8862B"/>
-                </a:solidFill>
-                <a:latin typeface="Calibri" pitchFamily="34" charset="0"/>
-                <a:ea typeface="Calibri" pitchFamily="34" charset="-122"/>
-                <a:cs typeface="Calibri" pitchFamily="34" charset="-120"/>
-              </a:rPr>
-              <a:t>2  </a:t>
-            </a:r>
+              <a:rPr lang="en-US" sz="2200" dirty="0">
+                <a:solidFill>
+                  <a:srgbClr val="1E2229"/>
+                </a:solidFill>
+                <a:latin typeface="Calibri" pitchFamily="34" charset="0"/>
+                <a:ea typeface="Calibri" pitchFamily="34" charset="-122"/>
+                <a:cs typeface="Calibri" pitchFamily="34" charset="-120"/>
+              </a:rPr>
+              <a:t>Gravity</a:t>
+            </a:r>
+            <a:endParaRPr lang="en-US" sz="2400" dirty="0"/>
+          </a:p>
+          <a:p>
             <a:pPr algn="l" indent="0" marL="0">
               <a:spcAft>
                 <a:spcPts val="600"/>
@@ -8035,15 +8042,15 @@
               <a:buNone/>
             </a:pPr>
             <a:r>
-              <a:rPr lang="en-US" sz="2200" dirty="0">
-                <a:solidFill>
-                  <a:srgbClr val="1E2229"/>
-                </a:solidFill>
-                <a:latin typeface="Calibri" pitchFamily="34" charset="0"/>
-                <a:ea typeface="Calibri" pitchFamily="34" charset="-122"/>
-                <a:cs typeface="Calibri" pitchFamily="34" charset="-120"/>
-              </a:rPr>
-              <a:t>Moon</a:t>
+              <a:rPr lang="en-US" sz="2200" b="1" dirty="0">
+                <a:solidFill>
+                  <a:srgbClr val="B8862B"/>
+                </a:solidFill>
+                <a:latin typeface="Calibri" pitchFamily="34" charset="0"/>
+                <a:ea typeface="Calibri" pitchFamily="34" charset="-122"/>
+                <a:cs typeface="Calibri" pitchFamily="34" charset="-120"/>
+              </a:rPr>
+              <a:t>D   </a:t>
             </a:r>
             <a:pPr algn="l" indent="0" marL="0">
               <a:spcAft>
@@ -8054,223 +8061,13 @@
             <a:r>
               <a:rPr lang="en-US" sz="2200" dirty="0">
                 <a:solidFill>
-                  <a:srgbClr val="B8862B"/>
-                </a:solidFill>
-                <a:latin typeface="Calibri" pitchFamily="34" charset="0"/>
-                <a:ea typeface="Calibri" pitchFamily="34" charset="-122"/>
-                <a:cs typeface="Calibri" pitchFamily="34" charset="-120"/>
-              </a:rPr>
-              <a:t>      ⟷      </a:t>
-            </a:r>
-            <a:pPr algn="l" indent="0" marL="0">
-              <a:spcAft>
-                <a:spcPts val="600"/>
-              </a:spcAft>
-              <a:buNone/>
-            </a:pPr>
-            <a:r>
-              <a:rPr lang="en-US" sz="2200" b="1" dirty="0">
-                <a:solidFill>
-                  <a:srgbClr val="B8862B"/>
-                </a:solidFill>
-                <a:latin typeface="Calibri" pitchFamily="34" charset="0"/>
-                <a:ea typeface="Calibri" pitchFamily="34" charset="-122"/>
-                <a:cs typeface="Calibri" pitchFamily="34" charset="-120"/>
-              </a:rPr>
-              <a:t>B  </a:t>
-            </a:r>
-            <a:pPr algn="l" indent="0" marL="0">
-              <a:spcAft>
-                <a:spcPts val="600"/>
-              </a:spcAft>
-              <a:buNone/>
-            </a:pPr>
-            <a:r>
-              <a:rPr lang="en-US" sz="2200" dirty="0">
-                <a:solidFill>
                   <a:srgbClr val="1E2229"/>
                 </a:solidFill>
                 <a:latin typeface="Calibri" pitchFamily="34" charset="0"/>
                 <a:ea typeface="Calibri" pitchFamily="34" charset="-122"/>
                 <a:cs typeface="Calibri" pitchFamily="34" charset="-120"/>
               </a:rPr>
-              <a:t>A large body that orbits the Sun</a:t>
-            </a:r>
-            <a:endParaRPr lang="en-US" sz="2400" dirty="0"/>
-          </a:p>
-          <a:p>
-            <a:pPr algn="l" indent="0" marL="0">
-              <a:spcAft>
-                <a:spcPts val="600"/>
-              </a:spcAft>
-              <a:buNone/>
-            </a:pPr>
-            <a:r>
-              <a:rPr lang="en-US" sz="2200" b="1" dirty="0">
-                <a:solidFill>
-                  <a:srgbClr val="B8862B"/>
-                </a:solidFill>
-                <a:latin typeface="Calibri" pitchFamily="34" charset="0"/>
-                <a:ea typeface="Calibri" pitchFamily="34" charset="-122"/>
-                <a:cs typeface="Calibri" pitchFamily="34" charset="-120"/>
-              </a:rPr>
-              <a:t>3  </a:t>
-            </a:r>
-            <a:pPr algn="l" indent="0" marL="0">
-              <a:spcAft>
-                <a:spcPts val="600"/>
-              </a:spcAft>
-              <a:buNone/>
-            </a:pPr>
-            <a:r>
-              <a:rPr lang="en-US" sz="2200" dirty="0">
-                <a:solidFill>
-                  <a:srgbClr val="1E2229"/>
-                </a:solidFill>
-                <a:latin typeface="Calibri" pitchFamily="34" charset="0"/>
-                <a:ea typeface="Calibri" pitchFamily="34" charset="-122"/>
-                <a:cs typeface="Calibri" pitchFamily="34" charset="-120"/>
-              </a:rPr>
-              <a:t>Artificial satellite</a:t>
-            </a:r>
-            <a:pPr algn="l" indent="0" marL="0">
-              <a:spcAft>
-                <a:spcPts val="600"/>
-              </a:spcAft>
-              <a:buNone/>
-            </a:pPr>
-            <a:r>
-              <a:rPr lang="en-US" sz="2200" dirty="0">
-                <a:solidFill>
-                  <a:srgbClr val="B8862B"/>
-                </a:solidFill>
-                <a:latin typeface="Calibri" pitchFamily="34" charset="0"/>
-                <a:ea typeface="Calibri" pitchFamily="34" charset="-122"/>
-                <a:cs typeface="Calibri" pitchFamily="34" charset="-120"/>
-              </a:rPr>
-              <a:t>      ⟷      </a:t>
-            </a:r>
-            <a:pPr algn="l" indent="0" marL="0">
-              <a:spcAft>
-                <a:spcPts val="600"/>
-              </a:spcAft>
-              <a:buNone/>
-            </a:pPr>
-            <a:r>
-              <a:rPr lang="en-US" sz="2200" b="1" dirty="0">
-                <a:solidFill>
-                  <a:srgbClr val="B8862B"/>
-                </a:solidFill>
-                <a:latin typeface="Calibri" pitchFamily="34" charset="0"/>
-                <a:ea typeface="Calibri" pitchFamily="34" charset="-122"/>
-                <a:cs typeface="Calibri" pitchFamily="34" charset="-120"/>
-              </a:rPr>
-              <a:t>C  </a:t>
-            </a:r>
-            <a:pPr algn="l" indent="0" marL="0">
-              <a:spcAft>
-                <a:spcPts val="600"/>
-              </a:spcAft>
-              <a:buNone/>
-            </a:pPr>
-            <a:r>
-              <a:rPr lang="en-US" sz="2200" dirty="0">
-                <a:solidFill>
-                  <a:srgbClr val="1E2229"/>
-                </a:solidFill>
-                <a:latin typeface="Calibri" pitchFamily="34" charset="0"/>
-                <a:ea typeface="Calibri" pitchFamily="34" charset="-122"/>
-                <a:cs typeface="Calibri" pitchFamily="34" charset="-120"/>
-              </a:rPr>
-              <a:t>Orbits once every 24 hours above the equator, so it stays over one point</a:t>
-            </a:r>
-            <a:endParaRPr lang="en-US" sz="2400" dirty="0"/>
-          </a:p>
-          <a:p>
-            <a:pPr algn="l" indent="0" marL="0">
-              <a:spcAft>
-                <a:spcPts val="600"/>
-              </a:spcAft>
-              <a:buNone/>
-            </a:pPr>
-            <a:r>
-              <a:rPr lang="en-US" sz="2200" b="1" dirty="0">
-                <a:solidFill>
-                  <a:srgbClr val="B8862B"/>
-                </a:solidFill>
-                <a:latin typeface="Calibri" pitchFamily="34" charset="0"/>
-                <a:ea typeface="Calibri" pitchFamily="34" charset="-122"/>
-                <a:cs typeface="Calibri" pitchFamily="34" charset="-120"/>
-              </a:rPr>
-              <a:t>4  </a:t>
-            </a:r>
-            <a:pPr algn="l" indent="0" marL="0">
-              <a:spcAft>
-                <a:spcPts val="600"/>
-              </a:spcAft>
-              <a:buNone/>
-            </a:pPr>
-            <a:r>
-              <a:rPr lang="en-US" sz="2200" dirty="0">
-                <a:solidFill>
-                  <a:srgbClr val="1E2229"/>
-                </a:solidFill>
-                <a:latin typeface="Calibri" pitchFamily="34" charset="0"/>
-                <a:ea typeface="Calibri" pitchFamily="34" charset="-122"/>
-                <a:cs typeface="Calibri" pitchFamily="34" charset="-120"/>
-              </a:rPr>
-              <a:t>Geostationary satellite</a:t>
-            </a:r>
-            <a:pPr algn="l" indent="0" marL="0">
-              <a:spcAft>
-                <a:spcPts val="600"/>
-              </a:spcAft>
-              <a:buNone/>
-            </a:pPr>
-            <a:r>
-              <a:rPr lang="en-US" sz="2200" dirty="0">
-                <a:solidFill>
-                  <a:srgbClr val="B8862B"/>
-                </a:solidFill>
-                <a:latin typeface="Calibri" pitchFamily="34" charset="0"/>
-                <a:ea typeface="Calibri" pitchFamily="34" charset="-122"/>
-                <a:cs typeface="Calibri" pitchFamily="34" charset="-120"/>
-              </a:rPr>
-              <a:t>      ⟷      </a:t>
-            </a:r>
-            <a:pPr algn="l" indent="0" marL="0">
-              <a:spcAft>
-                <a:spcPts val="600"/>
-              </a:spcAft>
-              <a:buNone/>
-            </a:pPr>
-            <a:r>
-              <a:rPr lang="en-US" sz="2200" b="1" dirty="0">
-                <a:solidFill>
-                  <a:srgbClr val="B8862B"/>
-                </a:solidFill>
-                <a:latin typeface="Calibri" pitchFamily="34" charset="0"/>
-                <a:ea typeface="Calibri" pitchFamily="34" charset="-122"/>
-                <a:cs typeface="Calibri" pitchFamily="34" charset="-120"/>
-              </a:rPr>
-              <a:t>D  </a:t>
-            </a:r>
-            <a:pPr algn="l" indent="0" marL="0">
-              <a:spcAft>
-                <a:spcPts val="600"/>
-              </a:spcAft>
-              <a:buNone/>
-            </a:pPr>
-            <a:r>
-              <a:rPr lang="en-US" sz="2200" dirty="0">
-                <a:solidFill>
-                  <a:srgbClr val="1E2229"/>
-                </a:solidFill>
-                <a:latin typeface="Calibri" pitchFamily="34" charset="0"/>
-                <a:ea typeface="Calibri" pitchFamily="34" charset="-122"/>
-                <a:cs typeface="Calibri" pitchFamily="34" charset="-120"/>
-              </a:rPr>
-              <a:t>Built by people and launched into orbit</a:t>
+              <a:t>Magnetism</a:t>
             </a:r>
             <a:endParaRPr lang="en-US" sz="2400" dirty="0"/>
           </a:p>
@@ -8284,12 +8081,12 @@
         </p:nvSpPr>
         <p:spPr>
           <a:xfrm>
-            <a:off x="2286000" y="5184648"/>
-            <a:ext cx="7619695" cy="685800"/>
+            <a:off x="2286000" y="5047488"/>
+            <a:ext cx="7619695" cy="822960"/>
           </a:xfrm>
           <a:prstGeom prst="roundRect">
             <a:avLst>
-              <a:gd name="adj" fmla="val 13333"/>
+              <a:gd name="adj" fmla="val 11111"/>
             </a:avLst>
           </a:prstGeom>
           <a:solidFill>
@@ -8311,8 +8108,8 @@
         </p:nvSpPr>
         <p:spPr>
           <a:xfrm>
-            <a:off x="2423160" y="5184648"/>
-            <a:ext cx="2926080" cy="685800"/>
+            <a:off x="2423160" y="5047488"/>
+            <a:ext cx="2926080" cy="822960"/>
           </a:xfrm>
           <a:prstGeom prst="rect">
             <a:avLst/>
@@ -9134,7 +8931,7 @@
                 <a:ea typeface="Cambria" pitchFamily="34" charset="-122"/>
                 <a:cs typeface="Cambria" pitchFamily="34" charset="-120"/>
               </a:rPr>
-              <a:t>A   It must increase</a:t>
+              <a:t>C   It must increase</a:t>
             </a:r>
             <a:endParaRPr lang="en-US" sz="1800" dirty="0"/>
           </a:p>
@@ -9558,155 +9355,44 @@
           <a:ln/>
         </p:spPr>
         <p:txBody>
-          <a:bodyPr wrap="square" lIns="63500" tIns="63500" rIns="63500" bIns="63500" rtlCol="0" anchor="t"/>
+          <a:bodyPr wrap="square" lIns="63500" tIns="63500" rIns="63500" bIns="63500" rtlCol="0" anchor="ctr"/>
           <a:lstStyle/>
           <a:p>
             <a:pPr algn="l" indent="0" marL="0">
               <a:spcAft>
-                <a:spcPts val="1000"/>
+                <a:spcPts val="1400"/>
               </a:spcAft>
               <a:buNone/>
             </a:pPr>
             <a:r>
-              <a:rPr lang="en-US" sz="2400" b="1" dirty="0">
-                <a:solidFill>
-                  <a:srgbClr val="815E1E"/>
-                </a:solidFill>
-                <a:latin typeface="Calibri" pitchFamily="34" charset="0"/>
-                <a:ea typeface="Calibri" pitchFamily="34" charset="-122"/>
-                <a:cs typeface="Calibri" pitchFamily="34" charset="-120"/>
-              </a:rPr>
-              <a:t>1  </a:t>
-            </a:r>
-            <a:pPr algn="l" indent="0" marL="0">
-              <a:spcAft>
-                <a:spcPts val="1000"/>
-              </a:spcAft>
-              <a:buNone/>
-            </a:pPr>
-            <a:r>
-              <a:rPr lang="en-US" sz="2400" dirty="0">
+              <a:rPr lang="en-US" sz="1800" dirty="0">
+                <a:solidFill>
+                  <a:srgbClr val="4A505C"/>
+                </a:solidFill>
+                <a:latin typeface="Calibri" pitchFamily="34" charset="0"/>
+                <a:ea typeface="Calibri" pitchFamily="34" charset="-122"/>
+                <a:cs typeface="Calibri" pitchFamily="34" charset="-120"/>
+              </a:rPr>
+              <a:t>Which force keeps the Moon in orbit around the Earth?</a:t>
+            </a:r>
+            <a:endParaRPr lang="en-US" sz="1800" dirty="0"/>
+          </a:p>
+          <a:p>
+            <a:pPr algn="l" indent="0" marL="0">
+              <a:buNone/>
+            </a:pPr>
+            <a:r>
+              <a:rPr lang="en-US" sz="3200" b="1" dirty="0">
                 <a:solidFill>
                   <a:srgbClr val="1E2229"/>
                 </a:solidFill>
-                <a:latin typeface="Calibri" pitchFamily="34" charset="0"/>
-                <a:ea typeface="Calibri" pitchFamily="34" charset="-122"/>
-                <a:cs typeface="Calibri" pitchFamily="34" charset="-120"/>
-              </a:rPr>
-              <a:t>Planet  →  B  A large body that orbits the Sun</a:t>
-            </a:r>
-            <a:endParaRPr lang="en-US" sz="2400" dirty="0"/>
-          </a:p>
-          <a:p>
-            <a:pPr algn="l" indent="0" marL="0">
-              <a:spcAft>
-                <a:spcPts val="1000"/>
-              </a:spcAft>
-              <a:buNone/>
-            </a:pPr>
-            <a:r>
-              <a:rPr lang="en-US" sz="2400" b="1" dirty="0">
-                <a:solidFill>
-                  <a:srgbClr val="815E1E"/>
-                </a:solidFill>
-                <a:latin typeface="Calibri" pitchFamily="34" charset="0"/>
-                <a:ea typeface="Calibri" pitchFamily="34" charset="-122"/>
-                <a:cs typeface="Calibri" pitchFamily="34" charset="-120"/>
-              </a:rPr>
-              <a:t>2  </a:t>
-            </a:r>
-            <a:pPr algn="l" indent="0" marL="0">
-              <a:spcAft>
-                <a:spcPts val="1000"/>
-              </a:spcAft>
-              <a:buNone/>
-            </a:pPr>
-            <a:r>
-              <a:rPr lang="en-US" sz="2400" dirty="0">
-                <a:solidFill>
-                  <a:srgbClr val="1E2229"/>
-                </a:solidFill>
-                <a:latin typeface="Calibri" pitchFamily="34" charset="0"/>
-                <a:ea typeface="Calibri" pitchFamily="34" charset="-122"/>
-                <a:cs typeface="Calibri" pitchFamily="34" charset="-120"/>
-              </a:rPr>
-              <a:t>Moon  →  A  A natural satellite that orbits a planet</a:t>
-            </a:r>
-            <a:endParaRPr lang="en-US" sz="2400" dirty="0"/>
-          </a:p>
-          <a:p>
-            <a:pPr algn="l" indent="0" marL="0">
-              <a:spcAft>
-                <a:spcPts val="1000"/>
-              </a:spcAft>
-              <a:buNone/>
-            </a:pPr>
-            <a:r>
-              <a:rPr lang="en-US" sz="2400" b="1" dirty="0">
-                <a:solidFill>
-                  <a:srgbClr val="815E1E"/>
-                </a:solidFill>
-                <a:latin typeface="Calibri" pitchFamily="34" charset="0"/>
-                <a:ea typeface="Calibri" pitchFamily="34" charset="-122"/>
-                <a:cs typeface="Calibri" pitchFamily="34" charset="-120"/>
-              </a:rPr>
-              <a:t>3  </a:t>
-            </a:r>
-            <a:pPr algn="l" indent="0" marL="0">
-              <a:spcAft>
-                <a:spcPts val="1000"/>
-              </a:spcAft>
-              <a:buNone/>
-            </a:pPr>
-            <a:r>
-              <a:rPr lang="en-US" sz="2400" dirty="0">
-                <a:solidFill>
-                  <a:srgbClr val="1E2229"/>
-                </a:solidFill>
-                <a:latin typeface="Calibri" pitchFamily="34" charset="0"/>
-                <a:ea typeface="Calibri" pitchFamily="34" charset="-122"/>
-                <a:cs typeface="Calibri" pitchFamily="34" charset="-120"/>
-              </a:rPr>
-              <a:t>Artificial satellite  →  D  Built by people and launched into orbit</a:t>
-            </a:r>
-            <a:endParaRPr lang="en-US" sz="2400" dirty="0"/>
-          </a:p>
-          <a:p>
-            <a:pPr algn="l" indent="0" marL="0">
-              <a:spcAft>
-                <a:spcPts val="1000"/>
-              </a:spcAft>
-              <a:buNone/>
-            </a:pPr>
-            <a:r>
-              <a:rPr lang="en-US" sz="2400" b="1" dirty="0">
-                <a:solidFill>
-                  <a:srgbClr val="815E1E"/>
-                </a:solidFill>
-                <a:latin typeface="Calibri" pitchFamily="34" charset="0"/>
-                <a:ea typeface="Calibri" pitchFamily="34" charset="-122"/>
-                <a:cs typeface="Calibri" pitchFamily="34" charset="-120"/>
-              </a:rPr>
-              <a:t>4  </a:t>
-            </a:r>
-            <a:pPr algn="l" indent="0" marL="0">
-              <a:spcAft>
-                <a:spcPts val="1000"/>
-              </a:spcAft>
-              <a:buNone/>
-            </a:pPr>
-            <a:r>
-              <a:rPr lang="en-US" sz="2400" dirty="0">
-                <a:solidFill>
-                  <a:srgbClr val="1E2229"/>
-                </a:solidFill>
-                <a:latin typeface="Calibri" pitchFamily="34" charset="0"/>
-                <a:ea typeface="Calibri" pitchFamily="34" charset="-122"/>
-                <a:cs typeface="Calibri" pitchFamily="34" charset="-120"/>
-              </a:rPr>
-              <a:t>Geostationary satellite  →  C  Orbits once every 24 hours above the equator, so it stays over one point</a:t>
-            </a:r>
-            <a:endParaRPr lang="en-US" sz="2400" dirty="0"/>
+                <a:latin typeface="Cambria" pitchFamily="34" charset="0"/>
+                <a:ea typeface="Cambria" pitchFamily="34" charset="-122"/>
+                <a:cs typeface="Cambria" pitchFamily="34" charset="-120"/>
+              </a:rPr>
+              <a:t>C   Gravity</a:t>
+            </a:r>
+            <a:endParaRPr lang="en-US" sz="1800" dirty="0"/>
           </a:p>
         </p:txBody>
       </p:sp>
@@ -9824,7 +9510,7 @@
                 <a:ea typeface="Calibri" pitchFamily="34" charset="-122"/>
                 <a:cs typeface="Calibri" pitchFamily="34" charset="-120"/>
               </a:rPr>
-              <a:t>All of them are kept in orbit by gravity. Planets orbit the Sun; moons are natural satellites of planets; artificial satellites are made by people; a geostationary satellite has a 24-hour period, matching the Earth's spin.</a:t>
+              <a:t>Gravity provides the force that keeps planets and satellites in their orbits. There is no air in space to give air resistance.</a:t>
             </a:r>
             <a:endParaRPr lang="en-US" sz="2400" dirty="0"/>
           </a:p>
@@ -10049,11 +9735,11 @@
         <p:spPr>
           <a:xfrm>
             <a:off x="548640" y="1389888"/>
-            <a:ext cx="3515258" cy="4754880"/>
+            <a:ext cx="2636444" cy="4754880"/>
           </a:xfrm>
           <a:prstGeom prst="roundRect">
             <a:avLst>
-              <a:gd name="adj" fmla="val 1561"/>
+              <a:gd name="adj" fmla="val 2081"/>
             </a:avLst>
           </a:prstGeom>
           <a:solidFill>
@@ -10135,7 +9821,7 @@
         <p:spPr>
           <a:xfrm>
             <a:off x="1463040" y="1572768"/>
-            <a:ext cx="2509418" cy="566928"/>
+            <a:ext cx="1630604" cy="566928"/>
           </a:xfrm>
           <a:prstGeom prst="rect">
             <a:avLst/>
@@ -10174,7 +9860,7 @@
         <p:spPr>
           <a:xfrm>
             <a:off x="731520" y="2355677"/>
-            <a:ext cx="3149498" cy="3651931"/>
+            <a:ext cx="2270684" cy="3651931"/>
           </a:xfrm>
           <a:prstGeom prst="rect">
             <a:avLst/>
@@ -10208,7 +9894,7 @@
           <a:p>
             <a:pPr algn="l" indent="0" marL="0">
               <a:spcAft>
-                <a:spcPts val="600"/>
+                <a:spcPts val="200"/>
               </a:spcAft>
               <a:buNone/>
             </a:pPr>
@@ -10225,7 +9911,7 @@
             </a:r>
             <a:pPr algn="l" indent="0" marL="0">
               <a:spcAft>
-                <a:spcPts val="600"/>
+                <a:spcPts val="200"/>
               </a:spcAft>
               <a:buNone/>
             </a:pPr>
@@ -10238,118 +9924,118 @@
                 <a:ea typeface="Calibri" pitchFamily="34" charset="-122"/>
                 <a:cs typeface="Calibri" pitchFamily="34" charset="-120"/>
               </a:rPr>
+              <a:t>Magnetism</a:t>
+            </a:r>
+            <a:endParaRPr lang="en-US" sz="2400" dirty="0"/>
+          </a:p>
+          <a:p>
+            <a:pPr algn="l" indent="0" marL="0">
+              <a:spcAft>
+                <a:spcPts val="200"/>
+              </a:spcAft>
+              <a:buNone/>
+            </a:pPr>
+            <a:r>
+              <a:rPr lang="en-US" sz="2400" b="1" dirty="0">
+                <a:solidFill>
+                  <a:srgbClr val="B8862B"/>
+                </a:solidFill>
+                <a:latin typeface="Calibri" pitchFamily="34" charset="0"/>
+                <a:ea typeface="Calibri" pitchFamily="34" charset="-122"/>
+                <a:cs typeface="Calibri" pitchFamily="34" charset="-120"/>
+              </a:rPr>
+              <a:t>B   </a:t>
+            </a:r>
+            <a:pPr algn="l" indent="0" marL="0">
+              <a:spcAft>
+                <a:spcPts val="200"/>
+              </a:spcAft>
+              <a:buNone/>
+            </a:pPr>
+            <a:r>
+              <a:rPr lang="en-US" sz="2400" dirty="0">
+                <a:solidFill>
+                  <a:srgbClr val="1E2229"/>
+                </a:solidFill>
+                <a:latin typeface="Calibri" pitchFamily="34" charset="0"/>
+                <a:ea typeface="Calibri" pitchFamily="34" charset="-122"/>
+                <a:cs typeface="Calibri" pitchFamily="34" charset="-120"/>
+              </a:rPr>
+              <a:t>Air resistance</a:t>
+            </a:r>
+            <a:endParaRPr lang="en-US" sz="2400" dirty="0"/>
+          </a:p>
+          <a:p>
+            <a:pPr algn="l" indent="0" marL="0">
+              <a:spcAft>
+                <a:spcPts val="200"/>
+              </a:spcAft>
+              <a:buNone/>
+            </a:pPr>
+            <a:r>
+              <a:rPr lang="en-US" sz="2400" b="1" dirty="0">
+                <a:solidFill>
+                  <a:srgbClr val="B8862B"/>
+                </a:solidFill>
+                <a:latin typeface="Calibri" pitchFamily="34" charset="0"/>
+                <a:ea typeface="Calibri" pitchFamily="34" charset="-122"/>
+                <a:cs typeface="Calibri" pitchFamily="34" charset="-120"/>
+              </a:rPr>
+              <a:t>C   </a:t>
+            </a:r>
+            <a:pPr algn="l" indent="0" marL="0">
+              <a:spcAft>
+                <a:spcPts val="200"/>
+              </a:spcAft>
+              <a:buNone/>
+            </a:pPr>
+            <a:r>
+              <a:rPr lang="en-US" sz="2400" dirty="0">
+                <a:solidFill>
+                  <a:srgbClr val="1E2229"/>
+                </a:solidFill>
+                <a:latin typeface="Calibri" pitchFamily="34" charset="0"/>
+                <a:ea typeface="Calibri" pitchFamily="34" charset="-122"/>
+                <a:cs typeface="Calibri" pitchFamily="34" charset="-120"/>
+              </a:rPr>
+              <a:t>Friction</a:t>
+            </a:r>
+            <a:endParaRPr lang="en-US" sz="2400" dirty="0"/>
+          </a:p>
+          <a:p>
+            <a:pPr algn="l" indent="0" marL="0">
+              <a:spcAft>
+                <a:spcPts val="200"/>
+              </a:spcAft>
+              <a:buNone/>
+            </a:pPr>
+            <a:r>
+              <a:rPr lang="en-US" sz="2400" b="1" dirty="0">
+                <a:solidFill>
+                  <a:srgbClr val="B8862B"/>
+                </a:solidFill>
+                <a:latin typeface="Calibri" pitchFamily="34" charset="0"/>
+                <a:ea typeface="Calibri" pitchFamily="34" charset="-122"/>
+                <a:cs typeface="Calibri" pitchFamily="34" charset="-120"/>
+              </a:rPr>
+              <a:t>D   </a:t>
+            </a:r>
+            <a:pPr algn="l" indent="0" marL="0">
+              <a:spcAft>
+                <a:spcPts val="200"/>
+              </a:spcAft>
+              <a:buNone/>
+            </a:pPr>
+            <a:r>
+              <a:rPr lang="en-US" sz="2400" dirty="0">
+                <a:solidFill>
+                  <a:srgbClr val="1E2229"/>
+                </a:solidFill>
+                <a:latin typeface="Calibri" pitchFamily="34" charset="0"/>
+                <a:ea typeface="Calibri" pitchFamily="34" charset="-122"/>
+                <a:cs typeface="Calibri" pitchFamily="34" charset="-120"/>
+              </a:rPr>
               <a:t>Gravity</a:t>
-            </a:r>
-            <a:endParaRPr lang="en-US" sz="2400" dirty="0"/>
-          </a:p>
-          <a:p>
-            <a:pPr algn="l" indent="0" marL="0">
-              <a:spcAft>
-                <a:spcPts val="600"/>
-              </a:spcAft>
-              <a:buNone/>
-            </a:pPr>
-            <a:r>
-              <a:rPr lang="en-US" sz="2400" b="1" dirty="0">
-                <a:solidFill>
-                  <a:srgbClr val="B8862B"/>
-                </a:solidFill>
-                <a:latin typeface="Calibri" pitchFamily="34" charset="0"/>
-                <a:ea typeface="Calibri" pitchFamily="34" charset="-122"/>
-                <a:cs typeface="Calibri" pitchFamily="34" charset="-120"/>
-              </a:rPr>
-              <a:t>B   </a:t>
-            </a:r>
-            <a:pPr algn="l" indent="0" marL="0">
-              <a:spcAft>
-                <a:spcPts val="600"/>
-              </a:spcAft>
-              <a:buNone/>
-            </a:pPr>
-            <a:r>
-              <a:rPr lang="en-US" sz="2400" dirty="0">
-                <a:solidFill>
-                  <a:srgbClr val="1E2229"/>
-                </a:solidFill>
-                <a:latin typeface="Calibri" pitchFamily="34" charset="0"/>
-                <a:ea typeface="Calibri" pitchFamily="34" charset="-122"/>
-                <a:cs typeface="Calibri" pitchFamily="34" charset="-120"/>
-              </a:rPr>
-              <a:t>Friction</a:t>
-            </a:r>
-            <a:endParaRPr lang="en-US" sz="2400" dirty="0"/>
-          </a:p>
-          <a:p>
-            <a:pPr algn="l" indent="0" marL="0">
-              <a:spcAft>
-                <a:spcPts val="600"/>
-              </a:spcAft>
-              <a:buNone/>
-            </a:pPr>
-            <a:r>
-              <a:rPr lang="en-US" sz="2400" b="1" dirty="0">
-                <a:solidFill>
-                  <a:srgbClr val="B8862B"/>
-                </a:solidFill>
-                <a:latin typeface="Calibri" pitchFamily="34" charset="0"/>
-                <a:ea typeface="Calibri" pitchFamily="34" charset="-122"/>
-                <a:cs typeface="Calibri" pitchFamily="34" charset="-120"/>
-              </a:rPr>
-              <a:t>C   </a:t>
-            </a:r>
-            <a:pPr algn="l" indent="0" marL="0">
-              <a:spcAft>
-                <a:spcPts val="600"/>
-              </a:spcAft>
-              <a:buNone/>
-            </a:pPr>
-            <a:r>
-              <a:rPr lang="en-US" sz="2400" dirty="0">
-                <a:solidFill>
-                  <a:srgbClr val="1E2229"/>
-                </a:solidFill>
-                <a:latin typeface="Calibri" pitchFamily="34" charset="0"/>
-                <a:ea typeface="Calibri" pitchFamily="34" charset="-122"/>
-                <a:cs typeface="Calibri" pitchFamily="34" charset="-120"/>
-              </a:rPr>
-              <a:t>Magnetism</a:t>
-            </a:r>
-            <a:endParaRPr lang="en-US" sz="2400" dirty="0"/>
-          </a:p>
-          <a:p>
-            <a:pPr algn="l" indent="0" marL="0">
-              <a:spcAft>
-                <a:spcPts val="600"/>
-              </a:spcAft>
-              <a:buNone/>
-            </a:pPr>
-            <a:r>
-              <a:rPr lang="en-US" sz="2400" b="1" dirty="0">
-                <a:solidFill>
-                  <a:srgbClr val="B8862B"/>
-                </a:solidFill>
-                <a:latin typeface="Calibri" pitchFamily="34" charset="0"/>
-                <a:ea typeface="Calibri" pitchFamily="34" charset="-122"/>
-                <a:cs typeface="Calibri" pitchFamily="34" charset="-120"/>
-              </a:rPr>
-              <a:t>D   </a:t>
-            </a:r>
-            <a:pPr algn="l" indent="0" marL="0">
-              <a:spcAft>
-                <a:spcPts val="600"/>
-              </a:spcAft>
-              <a:buNone/>
-            </a:pPr>
-            <a:r>
-              <a:rPr lang="en-US" sz="2400" dirty="0">
-                <a:solidFill>
-                  <a:srgbClr val="1E2229"/>
-                </a:solidFill>
-                <a:latin typeface="Calibri" pitchFamily="34" charset="0"/>
-                <a:ea typeface="Calibri" pitchFamily="34" charset="-122"/>
-                <a:cs typeface="Calibri" pitchFamily="34" charset="-120"/>
-              </a:rPr>
-              <a:t>Air resistance</a:t>
             </a:r>
             <a:endParaRPr lang="en-US" sz="2400" dirty="0"/>
           </a:p>
@@ -10363,12 +10049,12 @@
         </p:nvSpPr>
         <p:spPr>
           <a:xfrm>
-            <a:off x="4338218" y="1389888"/>
-            <a:ext cx="3515258" cy="4754880"/>
+            <a:off x="3459404" y="1389888"/>
+            <a:ext cx="2636444" cy="4754880"/>
           </a:xfrm>
           <a:prstGeom prst="roundRect">
             <a:avLst>
-              <a:gd name="adj" fmla="val 1561"/>
+              <a:gd name="adj" fmla="val 2081"/>
             </a:avLst>
           </a:prstGeom>
           <a:solidFill>
@@ -10390,7 +10076,7 @@
         </p:nvSpPr>
         <p:spPr>
           <a:xfrm>
-            <a:off x="4521098" y="1572768"/>
+            <a:off x="3642284" y="1572768"/>
             <a:ext cx="640080" cy="554309"/>
           </a:xfrm>
           <a:prstGeom prst="hexagon">
@@ -10410,7 +10096,7 @@
         </p:nvSpPr>
         <p:spPr>
           <a:xfrm>
-            <a:off x="4521098" y="1572768"/>
+            <a:off x="3642284" y="1572768"/>
             <a:ext cx="640080" cy="554309"/>
           </a:xfrm>
           <a:prstGeom prst="rect">
@@ -10449,8 +10135,8 @@
         </p:nvSpPr>
         <p:spPr>
           <a:xfrm>
-            <a:off x="5252618" y="1572768"/>
-            <a:ext cx="2509418" cy="566928"/>
+            <a:off x="4373804" y="1572768"/>
+            <a:ext cx="1630604" cy="566928"/>
           </a:xfrm>
           <a:prstGeom prst="rect">
             <a:avLst/>
@@ -10488,8 +10174,8 @@
         </p:nvSpPr>
         <p:spPr>
           <a:xfrm>
-            <a:off x="4521098" y="2355677"/>
-            <a:ext cx="3149498" cy="3651931"/>
+            <a:off x="3642284" y="2355677"/>
+            <a:ext cx="2270684" cy="3651931"/>
           </a:xfrm>
           <a:prstGeom prst="rect">
             <a:avLst/>
@@ -10561,12 +10247,12 @@
         </p:nvSpPr>
         <p:spPr>
           <a:xfrm>
-            <a:off x="8127797" y="1389888"/>
-            <a:ext cx="3515258" cy="4754880"/>
+            <a:off x="6370168" y="1389888"/>
+            <a:ext cx="5272888" cy="4754880"/>
           </a:xfrm>
           <a:prstGeom prst="roundRect">
             <a:avLst>
-              <a:gd name="adj" fmla="val 1561"/>
+              <a:gd name="adj" fmla="val 1154"/>
             </a:avLst>
           </a:prstGeom>
           <a:solidFill>
@@ -10588,7 +10274,7 @@
         </p:nvSpPr>
         <p:spPr>
           <a:xfrm>
-            <a:off x="8310677" y="1572768"/>
+            <a:off x="6553048" y="1572768"/>
             <a:ext cx="640080" cy="554309"/>
           </a:xfrm>
           <a:prstGeom prst="hexagon">
@@ -10608,7 +10294,7 @@
         </p:nvSpPr>
         <p:spPr>
           <a:xfrm>
-            <a:off x="8310677" y="1572768"/>
+            <a:off x="6553048" y="1572768"/>
             <a:ext cx="640080" cy="554309"/>
           </a:xfrm>
           <a:prstGeom prst="rect">
@@ -10647,8 +10333,8 @@
         </p:nvSpPr>
         <p:spPr>
           <a:xfrm>
-            <a:off x="9042197" y="1572768"/>
-            <a:ext cx="2509418" cy="566928"/>
+            <a:off x="7284568" y="1572768"/>
+            <a:ext cx="4267048" cy="566928"/>
           </a:xfrm>
           <a:prstGeom prst="rect">
             <a:avLst/>
@@ -10686,8 +10372,8 @@
         </p:nvSpPr>
         <p:spPr>
           <a:xfrm>
-            <a:off x="8310677" y="2355677"/>
-            <a:ext cx="3149498" cy="3651931"/>
+            <a:off x="6553048" y="2355677"/>
+            <a:ext cx="4907128" cy="3651931"/>
           </a:xfrm>
           <a:prstGeom prst="rect">
             <a:avLst/>
@@ -10706,7 +10392,7 @@
               <a:buNone/>
             </a:pPr>
             <a:r>
-              <a:rPr lang="en-US" sz="1800" b="1" dirty="0">
+              <a:rPr lang="en-US" sz="2400" b="1" dirty="0">
                 <a:solidFill>
                   <a:srgbClr val="1E2229"/>
                 </a:solidFill>
@@ -10716,7 +10402,7 @@
               </a:rPr>
               <a:t>In which direction does gravity pull a satellite in a circular orbit?</a:t>
             </a:r>
-            <a:endParaRPr lang="en-US" sz="1800" dirty="0"/>
+            <a:endParaRPr lang="en-US" sz="2400" dirty="0"/>
           </a:p>
           <a:p>
             <a:pPr algn="l" indent="0" marL="0">
@@ -10726,7 +10412,7 @@
               <a:buNone/>
             </a:pPr>
             <a:r>
-              <a:rPr lang="en-US" sz="1800" b="1" dirty="0">
+              <a:rPr lang="en-US" sz="2400" b="1" dirty="0">
                 <a:solidFill>
                   <a:srgbClr val="B8862B"/>
                 </a:solidFill>
@@ -10743,7 +10429,7 @@
               <a:buNone/>
             </a:pPr>
             <a:r>
-              <a:rPr lang="en-US" sz="1800" dirty="0">
+              <a:rPr lang="en-US" sz="2400" dirty="0">
                 <a:solidFill>
                   <a:srgbClr val="1E2229"/>
                 </a:solidFill>
@@ -10753,7 +10439,7 @@
               </a:rPr>
               <a:t>Towards the centre of the orbit</a:t>
             </a:r>
-            <a:endParaRPr lang="en-US" sz="1800" dirty="0"/>
+            <a:endParaRPr lang="en-US" sz="2400" dirty="0"/>
           </a:p>
           <a:p>
             <a:pPr algn="l" indent="0" marL="0">
@@ -10763,7 +10449,7 @@
               <a:buNone/>
             </a:pPr>
             <a:r>
-              <a:rPr lang="en-US" sz="1800" b="1" dirty="0">
+              <a:rPr lang="en-US" sz="2400" b="1" dirty="0">
                 <a:solidFill>
                   <a:srgbClr val="B8862B"/>
                 </a:solidFill>
@@ -10780,7 +10466,7 @@
               <a:buNone/>
             </a:pPr>
             <a:r>
-              <a:rPr lang="en-US" sz="1800" dirty="0">
+              <a:rPr lang="en-US" sz="2400" dirty="0">
                 <a:solidFill>
                   <a:srgbClr val="1E2229"/>
                 </a:solidFill>
@@ -10788,9 +10474,9 @@
                 <a:ea typeface="Calibri" pitchFamily="34" charset="-122"/>
                 <a:cs typeface="Calibri" pitchFamily="34" charset="-120"/>
               </a:rPr>
-              <a:t>Forwards, in the direction it is moving</a:t>
-            </a:r>
-            <a:endParaRPr lang="en-US" sz="1800" dirty="0"/>
+              <a:t>Outwards, away from the planet</a:t>
+            </a:r>
+            <a:endParaRPr lang="en-US" sz="2400" dirty="0"/>
           </a:p>
           <a:p>
             <a:pPr algn="l" indent="0" marL="0">
@@ -10800,7 +10486,7 @@
               <a:buNone/>
             </a:pPr>
             <a:r>
-              <a:rPr lang="en-US" sz="1800" b="1" dirty="0">
+              <a:rPr lang="en-US" sz="2400" b="1" dirty="0">
                 <a:solidFill>
                   <a:srgbClr val="B8862B"/>
                 </a:solidFill>
@@ -10817,7 +10503,7 @@
               <a:buNone/>
             </a:pPr>
             <a:r>
-              <a:rPr lang="en-US" sz="1800" dirty="0">
+              <a:rPr lang="en-US" sz="2400" dirty="0">
                 <a:solidFill>
                   <a:srgbClr val="1E2229"/>
                 </a:solidFill>
@@ -10825,9 +10511,9 @@
                 <a:ea typeface="Calibri" pitchFamily="34" charset="-122"/>
                 <a:cs typeface="Calibri" pitchFamily="34" charset="-120"/>
               </a:rPr>
-              <a:t>Outwards, away from the planet</a:t>
-            </a:r>
-            <a:endParaRPr lang="en-US" sz="1800" dirty="0"/>
+              <a:t>Forwards, in the direction it is moving</a:t>
+            </a:r>
+            <a:endParaRPr lang="en-US" sz="2400" dirty="0"/>
           </a:p>
           <a:p>
             <a:pPr algn="l" indent="0" marL="0">
@@ -10837,7 +10523,7 @@
               <a:buNone/>
             </a:pPr>
             <a:r>
-              <a:rPr lang="en-US" sz="1800" b="1" dirty="0">
+              <a:rPr lang="en-US" sz="2400" b="1" dirty="0">
                 <a:solidFill>
                   <a:srgbClr val="B8862B"/>
                 </a:solidFill>
@@ -10854,7 +10540,7 @@
               <a:buNone/>
             </a:pPr>
             <a:r>
-              <a:rPr lang="en-US" sz="1800" dirty="0">
+              <a:rPr lang="en-US" sz="2400" dirty="0">
                 <a:solidFill>
                   <a:srgbClr val="1E2229"/>
                 </a:solidFill>
@@ -10864,7 +10550,7 @@
               </a:rPr>
               <a:t>Backwards, against its motion</a:t>
             </a:r>
-            <a:endParaRPr lang="en-US" sz="1800" dirty="0"/>
+            <a:endParaRPr lang="en-US" sz="2400" dirty="0"/>
           </a:p>
         </p:txBody>
       </p:sp>
@@ -11087,11 +10773,11 @@
         <p:spPr>
           <a:xfrm>
             <a:off x="548640" y="1389888"/>
-            <a:ext cx="3515258" cy="4754880"/>
+            <a:ext cx="2636444" cy="4754880"/>
           </a:xfrm>
           <a:prstGeom prst="roundRect">
             <a:avLst>
-              <a:gd name="adj" fmla="val 1561"/>
+              <a:gd name="adj" fmla="val 2081"/>
             </a:avLst>
           </a:prstGeom>
           <a:solidFill>
@@ -11173,7 +10859,7 @@
         <p:spPr>
           <a:xfrm>
             <a:off x="1463040" y="1572768"/>
-            <a:ext cx="2509418" cy="566928"/>
+            <a:ext cx="1630604" cy="566928"/>
           </a:xfrm>
           <a:prstGeom prst="rect">
             <a:avLst/>
@@ -11212,7 +10898,7 @@
         <p:spPr>
           <a:xfrm>
             <a:off x="731520" y="2355677"/>
-            <a:ext cx="3149498" cy="614172"/>
+            <a:ext cx="2270684" cy="614172"/>
           </a:xfrm>
           <a:prstGeom prst="roundRect">
             <a:avLst>
@@ -11239,7 +10925,7 @@
         <p:spPr>
           <a:xfrm>
             <a:off x="822960" y="2428829"/>
-            <a:ext cx="2966618" cy="467868"/>
+            <a:ext cx="2087804" cy="467868"/>
           </a:xfrm>
           <a:prstGeom prst="rect">
             <a:avLst/>
@@ -11263,7 +10949,7 @@
                 <a:ea typeface="Calibri" pitchFamily="34" charset="-122"/>
                 <a:cs typeface="Calibri" pitchFamily="34" charset="-120"/>
               </a:rPr>
-              <a:t>A   Gravity</a:t>
+              <a:t>D   Gravity</a:t>
             </a:r>
             <a:endParaRPr lang="en-US" sz="2200" dirty="0"/>
           </a:p>
@@ -11278,7 +10964,7 @@
         <p:spPr>
           <a:xfrm>
             <a:off x="731520" y="3152729"/>
-            <a:ext cx="3149498" cy="2854879"/>
+            <a:ext cx="2270684" cy="2854879"/>
           </a:xfrm>
           <a:prstGeom prst="rect">
             <a:avLst/>
@@ -11297,7 +10983,7 @@
               <a:buNone/>
             </a:pPr>
             <a:r>
-              <a:rPr lang="en-US" sz="2000" dirty="0">
+              <a:rPr lang="en-US" sz="1800" dirty="0">
                 <a:solidFill>
                   <a:srgbClr val="4A505C"/>
                 </a:solidFill>
@@ -11307,14 +10993,14 @@
               </a:rPr>
               <a:t>Which force keeps the Moon in orbit around the Earth?</a:t>
             </a:r>
-            <a:endParaRPr lang="en-US" sz="2000" dirty="0"/>
-          </a:p>
-          <a:p>
-            <a:pPr algn="l" indent="0" marL="0">
-              <a:buNone/>
-            </a:pPr>
-            <a:r>
-              <a:rPr lang="en-US" sz="2000" i="1" dirty="0">
+            <a:endParaRPr lang="en-US" sz="1800" dirty="0"/>
+          </a:p>
+          <a:p>
+            <a:pPr algn="l" indent="0" marL="0">
+              <a:buNone/>
+            </a:pPr>
+            <a:r>
+              <a:rPr lang="en-US" sz="1800" i="1" dirty="0">
                 <a:solidFill>
                   <a:srgbClr val="1E2229"/>
                 </a:solidFill>
@@ -11324,7 +11010,7 @@
               </a:rPr>
               <a:t>Gravity provides the force that keeps planets and satellites in their orbits. There is no air in space to give air resistance.</a:t>
             </a:r>
-            <a:endParaRPr lang="en-US" sz="2000" dirty="0"/>
+            <a:endParaRPr lang="en-US" sz="1800" dirty="0"/>
           </a:p>
         </p:txBody>
       </p:sp>
@@ -11336,12 +11022,12 @@
         </p:nvSpPr>
         <p:spPr>
           <a:xfrm>
-            <a:off x="4338218" y="1389888"/>
-            <a:ext cx="3515258" cy="4754880"/>
+            <a:off x="3459404" y="1389888"/>
+            <a:ext cx="2636444" cy="4754880"/>
           </a:xfrm>
           <a:prstGeom prst="roundRect">
             <a:avLst>
-              <a:gd name="adj" fmla="val 1561"/>
+              <a:gd name="adj" fmla="val 2081"/>
             </a:avLst>
           </a:prstGeom>
           <a:solidFill>
@@ -11363,7 +11049,7 @@
         </p:nvSpPr>
         <p:spPr>
           <a:xfrm>
-            <a:off x="4521098" y="1572768"/>
+            <a:off x="3642284" y="1572768"/>
             <a:ext cx="640080" cy="554309"/>
           </a:xfrm>
           <a:prstGeom prst="hexagon">
@@ -11383,7 +11069,7 @@
         </p:nvSpPr>
         <p:spPr>
           <a:xfrm>
-            <a:off x="4521098" y="1572768"/>
+            <a:off x="3642284" y="1572768"/>
             <a:ext cx="640080" cy="554309"/>
           </a:xfrm>
           <a:prstGeom prst="rect">
@@ -11422,8 +11108,8 @@
         </p:nvSpPr>
         <p:spPr>
           <a:xfrm>
-            <a:off x="5252618" y="1572768"/>
-            <a:ext cx="2509418" cy="566928"/>
+            <a:off x="4373804" y="1572768"/>
+            <a:ext cx="1630604" cy="566928"/>
           </a:xfrm>
           <a:prstGeom prst="rect">
             <a:avLst/>
@@ -11461,8 +11147,8 @@
         </p:nvSpPr>
         <p:spPr>
           <a:xfrm>
-            <a:off x="4521098" y="2355677"/>
-            <a:ext cx="3149498" cy="614172"/>
+            <a:off x="3642284" y="2355677"/>
+            <a:ext cx="2270684" cy="614172"/>
           </a:xfrm>
           <a:prstGeom prst="roundRect">
             <a:avLst>
@@ -11488,8 +11174,8 @@
         </p:nvSpPr>
         <p:spPr>
           <a:xfrm>
-            <a:off x="4612538" y="2428829"/>
-            <a:ext cx="2966618" cy="467868"/>
+            <a:off x="3733724" y="2428829"/>
+            <a:ext cx="2087804" cy="467868"/>
           </a:xfrm>
           <a:prstGeom prst="rect">
             <a:avLst/>
@@ -11527,8 +11213,8 @@
         </p:nvSpPr>
         <p:spPr>
           <a:xfrm>
-            <a:off x="4521098" y="3152729"/>
-            <a:ext cx="3149498" cy="2854879"/>
+            <a:off x="3642284" y="3152729"/>
+            <a:ext cx="2270684" cy="2854879"/>
           </a:xfrm>
           <a:prstGeom prst="rect">
             <a:avLst/>
@@ -11547,7 +11233,7 @@
               <a:buNone/>
             </a:pPr>
             <a:r>
-              <a:rPr lang="en-US" sz="2200" dirty="0">
+              <a:rPr lang="en-US" sz="1800" dirty="0">
                 <a:solidFill>
                   <a:srgbClr val="4A505C"/>
                 </a:solidFill>
@@ -11557,14 +11243,14 @@
               </a:rPr>
               <a:t>The time a satellite takes to make one complete orbit is called its ___.</a:t>
             </a:r>
-            <a:endParaRPr lang="en-US" sz="2200" dirty="0"/>
-          </a:p>
-          <a:p>
-            <a:pPr algn="l" indent="0" marL="0">
-              <a:buNone/>
-            </a:pPr>
-            <a:r>
-              <a:rPr lang="en-US" sz="2200" i="1" dirty="0">
+            <a:endParaRPr lang="en-US" sz="1800" dirty="0"/>
+          </a:p>
+          <a:p>
+            <a:pPr algn="l" indent="0" marL="0">
+              <a:buNone/>
+            </a:pPr>
+            <a:r>
+              <a:rPr lang="en-US" sz="1800" i="1" dirty="0">
                 <a:solidFill>
                   <a:srgbClr val="1E2229"/>
                 </a:solidFill>
@@ -11574,7 +11260,7 @@
               </a:rPr>
               <a:t>The period is the time for one orbit. The Earth's period around the Sun is about 365 days.</a:t>
             </a:r>
-            <a:endParaRPr lang="en-US" sz="2200" dirty="0"/>
+            <a:endParaRPr lang="en-US" sz="1800" dirty="0"/>
           </a:p>
         </p:txBody>
       </p:sp>
@@ -11586,12 +11272,12 @@
         </p:nvSpPr>
         <p:spPr>
           <a:xfrm>
-            <a:off x="8127797" y="1389888"/>
-            <a:ext cx="3515258" cy="4754880"/>
+            <a:off x="6370168" y="1389888"/>
+            <a:ext cx="5272888" cy="4754880"/>
           </a:xfrm>
           <a:prstGeom prst="roundRect">
             <a:avLst>
-              <a:gd name="adj" fmla="val 1561"/>
+              <a:gd name="adj" fmla="val 1154"/>
             </a:avLst>
           </a:prstGeom>
           <a:solidFill>
@@ -11613,7 +11299,7 @@
         </p:nvSpPr>
         <p:spPr>
           <a:xfrm>
-            <a:off x="8310677" y="1572768"/>
+            <a:off x="6553048" y="1572768"/>
             <a:ext cx="640080" cy="554309"/>
           </a:xfrm>
           <a:prstGeom prst="hexagon">
@@ -11633,7 +11319,7 @@
         </p:nvSpPr>
         <p:spPr>
           <a:xfrm>
-            <a:off x="8310677" y="1572768"/>
+            <a:off x="6553048" y="1572768"/>
             <a:ext cx="640080" cy="554309"/>
           </a:xfrm>
           <a:prstGeom prst="rect">
@@ -11672,8 +11358,8 @@
         </p:nvSpPr>
         <p:spPr>
           <a:xfrm>
-            <a:off x="9042197" y="1572768"/>
-            <a:ext cx="2509418" cy="566928"/>
+            <a:off x="7284568" y="1572768"/>
+            <a:ext cx="4267048" cy="566928"/>
           </a:xfrm>
           <a:prstGeom prst="rect">
             <a:avLst/>
@@ -11711,12 +11397,12 @@
         </p:nvSpPr>
         <p:spPr>
           <a:xfrm>
-            <a:off x="8310677" y="2355677"/>
-            <a:ext cx="3149498" cy="955040"/>
+            <a:off x="6553048" y="2355677"/>
+            <a:ext cx="4907128" cy="614172"/>
           </a:xfrm>
           <a:prstGeom prst="roundRect">
             <a:avLst>
-              <a:gd name="adj" fmla="val 11489"/>
+              <a:gd name="adj" fmla="val 17866"/>
             </a:avLst>
           </a:prstGeom>
           <a:solidFill>
@@ -11738,8 +11424,8 @@
         </p:nvSpPr>
         <p:spPr>
           <a:xfrm>
-            <a:off x="8402117" y="2428829"/>
-            <a:ext cx="2966618" cy="808736"/>
+            <a:off x="6644488" y="2428829"/>
+            <a:ext cx="4724248" cy="467868"/>
           </a:xfrm>
           <a:prstGeom prst="rect">
             <a:avLst/>
@@ -11777,8 +11463,8 @@
         </p:nvSpPr>
         <p:spPr>
           <a:xfrm>
-            <a:off x="8310677" y="3493597"/>
-            <a:ext cx="3149498" cy="2514011"/>
+            <a:off x="6553048" y="3152729"/>
+            <a:ext cx="4907128" cy="2854879"/>
           </a:xfrm>
           <a:prstGeom prst="rect">
             <a:avLst/>
@@ -11797,7 +11483,7 @@
               <a:buNone/>
             </a:pPr>
             <a:r>
-              <a:rPr lang="en-US" sz="2000" dirty="0">
+              <a:rPr lang="en-US" sz="2200" dirty="0">
                 <a:solidFill>
                   <a:srgbClr val="4A505C"/>
                 </a:solidFill>
@@ -11807,14 +11493,14 @@
               </a:rPr>
               <a:t>In which direction does gravity pull a satellite in a circular orbit?</a:t>
             </a:r>
-            <a:endParaRPr lang="en-US" sz="2000" dirty="0"/>
-          </a:p>
-          <a:p>
-            <a:pPr algn="l" indent="0" marL="0">
-              <a:buNone/>
-            </a:pPr>
-            <a:r>
-              <a:rPr lang="en-US" sz="2000" i="1" dirty="0">
+            <a:endParaRPr lang="en-US" sz="2200" dirty="0"/>
+          </a:p>
+          <a:p>
+            <a:pPr algn="l" indent="0" marL="0">
+              <a:buNone/>
+            </a:pPr>
+            <a:r>
+              <a:rPr lang="en-US" sz="2200" i="1" dirty="0">
                 <a:solidFill>
                   <a:srgbClr val="1E2229"/>
                 </a:solidFill>
@@ -11824,7 +11510,7 @@
               </a:rPr>
               <a:t>Gravity pulls the satellite towards the centre of the planet, which is the centre of the circular orbit.</a:t>
             </a:r>
-            <a:endParaRPr lang="en-US" sz="2000" dirty="0"/>
+            <a:endParaRPr lang="en-US" sz="2200" dirty="0"/>
           </a:p>
         </p:txBody>
       </p:sp>

--- a/decks/triple-space/triple-space_ch3_orbits.pptx
+++ b/decks/triple-space/triple-space_ch3_orbits.pptx
@@ -124,29 +124,29 @@
   <p:extLst>
     <p:ext uri="{521415D9-36F7-43E2-AB2F-B90AF26B5E84}">
       <p14:sectionLst xmlns:p14="http://schemas.microsoft.com/office/powerpoint/2010/main">
-        <p14:section name="Opening" id="{6e0453c7-7fb9-f9ef-d331-a5bb79045809}">
+        <p14:section name="Opening" id="{14c06c35-ed04-0eae-758d-daa45908853f}">
           <p14:sldIdLst>
             <p14:sldId id="256"/>
           </p14:sldIdLst>
         </p14:section>
-        <p14:section name="Gate" id="{3d529f84-e2e7-3d3b-c8c3-2563f5acf4e6}">
+        <p14:section name="Gate" id="{c7753c19-95cf-285a-9d4a-3ff48d818fcd}">
           <p14:sldIdLst>
             <p14:sldId id="257"/>
             <p14:sldId id="258"/>
           </p14:sldIdLst>
         </p14:section>
-        <p14:section name="Pre-teach" id="{2581f2c8-1d5d-7ee3-6d03-e81ea5f47eb7}">
+        <p14:section name="Pre-teach" id="{71a5e50e-85f3-7959-d37e-4e54b99c7e1e}">
           <p14:sldIdLst>
             <p14:sldId id="259"/>
           </p14:sldIdLst>
         </p14:section>
-        <p14:section name="Read-along" id="{85b51eb6-2c4e-b6c0-8e91-1ad1765902ba}">
+        <p14:section name="Read-along" id="{c58c9ca0-b32d-b3fb-066b-bc71dd07d500}">
           <p14:sldIdLst>
             <p14:sldId id="260"/>
             <p14:sldId id="261"/>
           </p14:sldIdLst>
         </p14:section>
-        <p14:section name="Teach" id="{861027b0-4720-5a57-f8dc-a9ecbfdfda13}">
+        <p14:section name="Teach" id="{8b482416-f1fd-2964-6b11-cb103ff8f7cd}">
           <p14:sldIdLst>
             <p14:sldId id="262"/>
             <p14:sldId id="263"/>
@@ -154,7 +154,7 @@
             <p14:sldId id="265"/>
           </p14:sldIdLst>
         </p14:section>
-        <p14:section name="Routes" id="{7e11c89a-3f3b-ec14-e304-7b9262f9cdb0}">
+        <p14:section name="Routes" id="{d67dbbd3-cfeb-e0b2-4bc5-c106fe5ffadc}">
           <p14:sldIdLst>
             <p14:sldId id="266"/>
             <p14:sldId id="267"/>
@@ -162,12 +162,12 @@
             <p14:sldId id="269"/>
           </p14:sldIdLst>
         </p14:section>
-        <p14:section name="Close" id="{3017649b-d1a9-da35-5333-54b35c85a4bc}">
+        <p14:section name="Close" id="{22ec018f-3eab-d520-8d4a-3ccedbd0d9a2}">
           <p14:sldIdLst>
             <p14:sldId id="270"/>
           </p14:sldIdLst>
         </p14:section>
-        <p14:section name="Answers" id="{71961640-ff2e-1d65-1351-59207696b4dc}">
+        <p14:section name="Answers" id="{4618afda-35ec-f24e-62c8-3215a79ceaee}">
           <p14:sldIdLst>
             <p14:sldId id="271"/>
             <p14:sldId id="272"/>
